--- a/1_Sessions/B4_Power_Query/Slide_B4.pptx
+++ b/1_Sessions/B4_Power_Query/Slide_B4.pptx
@@ -1122,7 +1122,7 @@
           </a:p>
           <a:p>
             <a:r>
-              <a:t>Để cả lớp cùng thấy lỗi, dù máy để tiếng Anh hay tiếng Việt, mình cố tình đọc theo kiểu Mỹ: (→ chuột phải Order_Date → Change Type → Using Locale → Data Type: Date, Locale: English (United States) → OK) Nhìn Column quality: cột đỏ gần hai phần ba. Đúng 1.735 trên 2.726 dòng lỗi, vì kiểu Mỹ đọc tháng trước ngày sau, mà không có tháng 13. Còn nguy hiểm hơn: (→ trỏ một dòng ngày 02/01/2025) ngày 2 tháng 1 bị đọc thành 1 tháng 2 — không báo lỗi gì cả. 991 dòng như thế.</a:t>
+              <a:t>Để cả lớp cùng thấy lỗi, dù máy để tiếng Anh hay tiếng Việt, mình cố tình đọc theo kiểu Mỹ: (→ chuột phải Order_Date → Change Type → Using Locale → Data Type: Date, Locale: English (United States) → OK) Nhìn Column quality: cột đỏ gần hai phần ba. Đúng 1.735 trên 2.726 dòng lỗi, vì kiểu Mỹ đọc tháng trước ngày sau, mà không có tháng 13. Còn nguy hiểm hơn: (→ trỏ một dòng ngày 02/01/2025) ngày 2 tháng 1 bị đọc thành 1 tháng 2 — không báo lỗi gì cả. 927 dòng như thế.</a:t>
             </a:r>
           </a:p>
           <a:p>
@@ -1662,7 +1662,7 @@
           </a:p>
           <a:p>
             <a:r>
-              <a:t>(→ chọn cột Store_Code, giữ Ctrl chọn Store_Name → Transform → Unpivot Columns ▾ → Unpivot Other Columns) Chọn hai cột giữ nguyên, rồi xoay mọi cột còn lại. (→ đổi tên: Attribute → Thang, Value → Target) Cột Thang đang là chữ "Tháng 1". (→ chọn Thang → Transform → Extract → Text After Delimiter → dấu cách → OK; đổi kiểu Whole Number; Target → Whole Number; chuột phải Store_Name → Remove) Lấy phần số, bỏ Store_Name vì tên cửa hàng đã có ở bảng Store. (→ Add Column → Custom Column: tên Ngay_Dau_Thang, công thức #date(2025, [Thang], 1) → OK → đổi kiểu Date) Cột ngày đầu tháng này để Buổi 5 nối Target với Calendar. (→ Transform → Count Rows = 144 → xóa bước đếm) 144 dòng: 12 cửa hàng nhân 12 tháng.</a:t>
+              <a:t>(→ chọn cột Store_Code, giữ Ctrl chọn Store_Name → Transform → Unpivot Columns ▾ → Unpivot Other Columns) Chọn hai cột giữ nguyên, rồi xoay mọi cột còn lại. (→ đổi tên: Attribute → Thang, Value → Target) Cột Thang đang là chữ "Tháng 1". (→ chọn Thang → Transform → Extract → Text After Delimiter → dấu cách → OK; đổi kiểu Whole Number; Target → Whole Number; chuột phải Store_Name → Remove) Lấy phần số, bỏ Store_Name vì tên cửa hàng đã có ở bảng Store. (→ Add Column → Custom Column: tên Ngay_Dau_Thang, công thức #date(2025, [Thang], 1), Data type: Date → OK) Cột ngày đầu tháng này để Buổi 5 nối Target với Calendar. (→ Transform → Count Rows = 144 → xóa bước đếm) 144 dòng: 12 cửa hàng nhân 12 tháng.</a:t>
             </a:r>
           </a:p>
           <a:p>
@@ -1752,7 +1752,7 @@
           </a:p>
           <a:p>
             <a:r>
-              <a:t>Giờ dùng Group By để đối soát. (→ trên Sales_T1: Add Column → Custom Column: tên Revenue, công thức [Quantity]  [Unit_Price] → đổi kiểu Whole Number) Thêm cột doanh thu. (→ khung Queries: chuột phải Sales_T1 → Reference; đổi tên query mới thành DoiSoat_T1) Reference tạo một query mới đọc kết quả của Sales_T1 — Sales_T1 đổi thì nó đổi theo. (→ Transform → Group By → Advanced; Group by Store_Code; So_dong = Count Rows; Add aggregation: Doanh_thu = Sum of Revenue → OK)* 12 dòng: mỗi cửa hàng một số dòng và một tổng doanh thu tháng 1. Cao nhất ST08, 345 dòng, 52,8 triệu. Cộng lại đúng 2.725 dòng, 425.850.000. Đây là bảng đối soát: có số liệu hệ thống thì so từng cửa hàng trước khi nạp dữ liệu đi đâu cả.</a:t>
+              <a:t>Giờ dùng Group By để đối soát. (→ trên Sales_T1: Add Column → Custom Column: tên Revenue, công thức [Quantity] * [Unit_Price], Data type: Whole Number → OK) Thêm cột doanh thu. (→ khung Queries: chuột phải Sales_T1 → Reference; đổi tên query mới thành DoiSoat_T1) Reference tạo một query mới đọc kết quả của Sales_T1 — Sales_T1 đổi thì nó đổi theo. (→ Transform → Group By → Advanced; Group by Store_Code; So_dong = Count Rows; Add aggregation: Doanh_thu = Sum of Revenue → OK) 12 dòng: mỗi cửa hàng một số dòng và một tổng doanh thu tháng 1. Cao nhất ST08, 345 dòng, 52,8 triệu. Cộng lại đúng 2.725 dòng, 425.850.000. Đây là bảng đối soát: có số liệu hệ thống thì so từng cửa hàng trước khi nạp dữ liệu đi đâu cả.</a:t>
             </a:r>
           </a:p>
           <a:p>
@@ -2007,7 +2007,7 @@
           </a:p>
           <a:p>
             <a:r>
-              <a:t>Bảng gộp này vẫn bẩn y như Sales_T1 lúc đầu. Mình làm sạch lại — lần này nhanh vì các bạn đã biết từng bước, và đây là lần cuối cùng: (→ trên Sales: bấm X xóa bước Changed Type cuối cùng; chuột phải cột Source.Name → Remove; Store_Code → Transform → Trim; Order_Date → Using Locale → Date, Vietnamese; Unit_Price → Using Locale → Whole Number, Vietnamese; Line_No, Quantity → Whole Number; Order_ID, Store_Code, Customer_ID, Product_Code → Text; Ctrl+A → Remove Duplicates; Add Column → Custom Column Revenue = [Quantity]  [Unit_Price], Whole Number; chọn Order_Date → Add Column → Date → Year → Year, đổi tên Nam; Add Column → Date → Month → Month, đổi tên Thang)*</a:t>
+              <a:t>Bảng gộp này vẫn bẩn y như Sales_T1 lúc đầu. Mình làm sạch lại — lần này nhanh vì các bạn đã biết từng bước, và đây là lần cuối cùng: (→ trên Sales: bấm X xóa bước Changed Type cuối cùng; chuột phải cột Source.Name → Remove; Store_Code → Transform → Trim; Order_Date → Using Locale → Date, Vietnamese; Unit_Price → Using Locale → Whole Number, Vietnamese; Line_No, Quantity → Whole Number; Order_ID, Store_Code, Customer_ID, Product_Code → Text; Ctrl+A → Remove Duplicates; Add Column → Custom Column Revenue = [Quantity] * [Unit_Price], Whole Number; chọn Order_Date → Add Column → Date → Year → Year, đổi tên Nam; Add Column → Date → Month → Month, đổi tên Thang)</a:t>
             </a:r>
           </a:p>
           <a:p>
@@ -2367,7 +2367,7 @@
           </a:p>
           <a:p>
             <a:r>
-              <a:t>(→ Transform → To Table → OK; đổi tên Column1 thành Date, kiểu Date; chọn Date → Add Column → Date → Year → Year (đổi tên Nam); Month → Month (Thang); Quarter → Quarter of Year (Quy); Day → Name of Day (Thu); Count Rows = 731 → xóa bước đếm) Vài cú nhấp, mình có Năm, Tháng, Quý, Thứ cho một trục thời gian dùng chung. Tên thứ hiện theo ngôn ngữ máy: máy tiếng Anh ra Monday, máy tiếng Việt ra Thứ Hai.</a:t>
+              <a:t>(→ Transform → To Table → OK; đổi tên Column1 thành Date, kiểu Date; chọn Date → Add Column → Date → Year → Year (đổi tên Nam); Month → Month (Thang); Quarter → Quarter of Year (Quy); Day → Name of Day (Thu); Count Rows = 731 → xóa bước đếm) Vài cú nhấp, mình có Năm, Tháng, Quý, Thứ cho một trục thời gian dùng chung. Tên thứ hiện theo Locale của workbook, mặc định lấy theo Region của máy lúc tạo query: máy tiếng Anh ra Monday, máy tiếng Việt (hoặc workbook đặt Locale Vietnamese trong Query Options) ra Thứ Hai.</a:t>
             </a:r>
           </a:p>
           <a:p>
@@ -3397,7 +3397,7 @@
           </a:p>
           <a:p>
             <a:r>
-              <a:t>D. Các bước trong Applied Steps tham chiếu tên cột cụ thể; nguồn đổi tên cột thì bước đó không tìm thấy cột và báo lỗi "The column 'Store_Code' of the table wasn't found". Cách xử lý: đổi lại tên cột ngay sau bước gộp (Rename Columns), rồi các bước sau chạy như cũ. Mỗi khi nguồn đổi cấu trúc, kiểm tra Applied Steps từ trên xuống.</a:t>
+              <a:t>D. Bước Expand của query gộp lấy danh sách cột từ file mẫu — file đầu tiên trong thư mục, ở đây là Sales_2024. File nào thiếu một cột trong danh sách đó thì cột ấy để trống; cột lạ như StoreCode thì bị bỏ. Power Query không báo lỗi gì cả, nên đây là loại sai nguy hiểm nhất: số tổng vẫn đúng, nhưng doanh thu tháng mới không gắn được cửa hàng nào. Cách bắt: đối soát sau mỗi lần Refresh — Count Rows theo tháng, lọc Store_Code trống, hoặc nhìn mục (blank) trong bộ lọc Store_Code của Pivot. Cách sửa: tốt nhất là yêu cầu bên xuất file giữ đúng tên cột; nếu không được, mở Transform Sample File → Advanced Editor, thêm một bước Table.RenameColumns(..., {{"StoreCode", "Store_Code"}}, MissingField.Ignore) (bước ở đó chạy trên từng file trước khi nối — handout mục 7). Phải có MissingField.Ignore: file mẫu và các file cũ không có cột StoreCode, thiếu nó thì Refresh báo lỗi; vì file mẫu không có cột này nên cũng không bấm Rename trên giao diện được.</a:t>
             </a:r>
           </a:p>
         </p:txBody>
@@ -7457,7 +7457,7 @@
         <p:spPr>
           <a:xfrm>
             <a:off x="1524000" y="5760720"/>
-            <a:ext cx="10119360" cy="457200"/>
+            <a:ext cx="10119360" cy="822960"/>
           </a:xfrm>
           <a:prstGeom prst="rect">
             <a:avLst/>
@@ -7483,6 +7483,36 @@
                 </a:solidFill>
               </a:rPr>
               <a:t>Bắt buộc máy Windows có Power Query (Data → Get Data)</a:t>
+            </a:r>
+            <a:r>
+              <a:rPr lang="vi-VN" sz="1400" b="1">
+                <a:solidFill>
+                  <a:srgbClr val="1B2230"/>
+                </a:solidFill>
+              </a:rPr>
+              <a:t/>
+            </a:r>
+            <a:r>
+              <a:rPr lang="vi-VN" sz="1400">
+                <a:solidFill>
+                  <a:srgbClr val="585858"/>
+                </a:solidFill>
+              </a:rPr>
+              <a:t/>
+            </a:r>
+            <a:endParaRPr lang="vi-VN" sz="1400"/>
+          </a:p>
+          <a:p>
+            <a:pPr marL="0" indent="0">
+              <a:buNone/>
+            </a:pPr>
+            <a:r>
+              <a:rPr lang="vi-VN" sz="1400">
+                <a:solidFill>
+                  <a:srgbClr val="585858"/>
+                </a:solidFill>
+              </a:rPr>
+              <a:t>Mở sẵn: file khởi đầu B3_MCI_Mart_Q1_2025_Answer.xlsx (đáp án Buổi 3)</a:t>
             </a:r>
             <a:r>
               <a:rPr lang="vi-VN" sz="1400" b="1">
@@ -8147,7 +8177,7 @@
                 </a:solidFill>
                 <a:latin typeface="Arial"/>
               </a:rPr>
-              <a:t>dòng Error; 991 dòng đảo ngày–tháng</a:t>
+              <a:t>dòng Error; 927 dòng đảo ngày–tháng</a:t>
             </a:r>
           </a:p>
         </p:txBody>
@@ -8531,7 +8561,7 @@
                           </a:solidFill>
                           <a:latin typeface="Arial"/>
                         </a:rPr>
-                        <a:t>Tên (đỏ)</a:t>
+                        <a:t>Tên</a:t>
                       </a:r>
                     </a:p>
                   </a:txBody>
@@ -8838,8 +8868,8 @@
         </p:blipFill>
         <p:spPr>
           <a:xfrm>
-            <a:off x="1527048" y="3648815"/>
-            <a:ext cx="4965192" cy="2349289"/>
+            <a:off x="2125386" y="3611880"/>
+            <a:ext cx="3768516" cy="1783080"/>
           </a:xfrm>
           <a:prstGeom prst="rect">
             <a:avLst/>
@@ -8867,8 +8897,8 @@
         </p:blipFill>
         <p:spPr>
           <a:xfrm>
-            <a:off x="6684264" y="3793562"/>
-            <a:ext cx="4965192" cy="2059796"/>
+            <a:off x="7017780" y="3611880"/>
+            <a:ext cx="4298160" cy="1783080"/>
           </a:xfrm>
           <a:prstGeom prst="rect">
             <a:avLst/>
@@ -8882,7 +8912,121 @@
       </p:pic>
       <p:sp>
         <p:nvSpPr>
-          <p:cNvPr id="7" name="Footnote"/>
+          <p:cNvPr id="7" name="TIP callout"/>
+          <p:cNvSpPr/>
+          <p:nvPr/>
+        </p:nvSpPr>
+        <p:spPr>
+          <a:xfrm>
+            <a:off x="1527048" y="5486400"/>
+            <a:ext cx="10122408" cy="640080"/>
+          </a:xfrm>
+          <a:prstGeom prst="roundRect">
+            <a:avLst>
+              <a:gd name="adj" fmla="val 6000"/>
+            </a:avLst>
+          </a:prstGeom>
+          <a:solidFill>
+            <a:srgbClr val="F3F5F9"/>
+          </a:solidFill>
+          <a:ln>
+            <a:noFill/>
+          </a:ln>
+          <a:effectLst/>
+        </p:spPr>
+        <p:style>
+          <a:lnRef idx="1">
+            <a:schemeClr val="accent1"/>
+          </a:lnRef>
+          <a:fillRef idx="3">
+            <a:schemeClr val="accent1"/>
+          </a:fillRef>
+          <a:effectRef idx="2">
+            <a:schemeClr val="accent1"/>
+          </a:effectRef>
+          <a:fontRef idx="minor">
+            <a:schemeClr val="lt1"/>
+          </a:fontRef>
+        </p:style>
+        <p:txBody>
+          <a:bodyPr rtlCol="0" anchor="ctr"/>
+          <a:lstStyle/>
+          <a:p>
+            <a:pPr algn="ctr"/>
+          </a:p>
+        </p:txBody>
+      </p:sp>
+      <p:sp>
+        <p:nvSpPr>
+          <p:cNvPr id="8" name="TextBox"/>
+          <p:cNvSpPr txBox="1"/>
+          <p:nvPr/>
+        </p:nvSpPr>
+        <p:spPr>
+          <a:xfrm>
+            <a:off x="1636776" y="5596128"/>
+            <a:ext cx="548640" cy="320040"/>
+          </a:xfrm>
+          <a:prstGeom prst="rect">
+            <a:avLst/>
+          </a:prstGeom>
+          <a:noFill/>
+        </p:spPr>
+        <p:txBody>
+          <a:bodyPr wrap="square" lIns="0" rIns="0" tIns="0" bIns="0" anchor="ctr">
+            <a:spAutoFit/>
+          </a:bodyPr>
+          <a:lstStyle/>
+          <a:p>
+            <a:r>
+              <a:rPr sz="1400" b="1">
+                <a:solidFill>
+                  <a:srgbClr val="203864"/>
+                </a:solidFill>
+                <a:latin typeface="Arial"/>
+              </a:rPr>
+              <a:t>TIP</a:t>
+            </a:r>
+          </a:p>
+        </p:txBody>
+      </p:sp>
+      <p:sp>
+        <p:nvSpPr>
+          <p:cNvPr id="9" name="TIP text"/>
+          <p:cNvSpPr txBox="1"/>
+          <p:nvPr/>
+        </p:nvSpPr>
+        <p:spPr>
+          <a:xfrm>
+            <a:off x="2212848" y="5577840"/>
+            <a:ext cx="9326880" cy="457199"/>
+          </a:xfrm>
+          <a:prstGeom prst="rect">
+            <a:avLst/>
+          </a:prstGeom>
+          <a:noFill/>
+        </p:spPr>
+        <p:txBody>
+          <a:bodyPr wrap="square" lIns="0" rIns="0" tIns="0" bIns="0" anchor="t">
+            <a:spAutoFit/>
+          </a:bodyPr>
+          <a:lstStyle/>
+          <a:p>
+            <a:r>
+              <a:rPr sz="1600" b="0">
+                <a:solidFill>
+                  <a:srgbClr val="1B2230"/>
+                </a:solidFill>
+                <a:latin typeface="Arial"/>
+              </a:rPr>
+              <a:t>Trim/Clean có ở cả Transform (sửa cột đang có) và Add Column (tạo cột mới): chọn đúng tab theo việc mình muốn.</a:t>
+            </a:r>
+          </a:p>
+        </p:txBody>
+      </p:sp>
+      <p:sp>
+        <p:nvSpPr>
+          <p:cNvPr id="10" name="Footnote"/>
           <p:cNvSpPr txBox="1"/>
           <p:nvPr/>
         </p:nvSpPr>
@@ -8909,7 +9053,7 @@
                 </a:solidFill>
                 <a:latin typeface="Arial"/>
               </a:rPr>
-              <a:t>Ảnh: query Sales_T1 (Practice/Data_Sales/Sales_2025-01.csv) · Trim/Clean có ở cả Transform (sửa cột) và Add Column (tạo cột mới)</a:t>
+              <a:t>Ảnh: Query Editor, query Sales_T1 (Practice/Data_Sales/Sales_2025-01.csv)</a:t>
             </a:r>
           </a:p>
         </p:txBody>
@@ -9072,8 +9216,8 @@
         </p:blipFill>
         <p:spPr>
           <a:xfrm>
-            <a:off x="1650846" y="2560320"/>
-            <a:ext cx="4717595" cy="2651760"/>
+            <a:off x="1683110" y="2560320"/>
+            <a:ext cx="3985555" cy="2240280"/>
           </a:xfrm>
           <a:prstGeom prst="rect">
             <a:avLst/>
@@ -9101,8 +9245,8 @@
         </p:blipFill>
         <p:spPr>
           <a:xfrm>
-            <a:off x="6684264" y="2593365"/>
-            <a:ext cx="4965192" cy="2585669"/>
+            <a:off x="5020056" y="2561754"/>
+            <a:ext cx="4297680" cy="2237412"/>
           </a:xfrm>
           <a:prstGeom prst="rect">
             <a:avLst/>
@@ -9116,14 +9260,128 @@
       </p:pic>
       <p:sp>
         <p:nvSpPr>
-          <p:cNvPr id="8" name="TIP callout"/>
+          <p:cNvPr id="8" name="Stat card"/>
           <p:cNvSpPr/>
           <p:nvPr/>
         </p:nvSpPr>
         <p:spPr>
           <a:xfrm>
-            <a:off x="1527048" y="5349240"/>
-            <a:ext cx="10122408" cy="822960"/>
+            <a:off x="9454896" y="2560320"/>
+            <a:ext cx="2194560" cy="2240280"/>
+          </a:xfrm>
+          <a:prstGeom prst="roundRect">
+            <a:avLst>
+              <a:gd name="adj" fmla="val 6000"/>
+            </a:avLst>
+          </a:prstGeom>
+          <a:solidFill>
+            <a:srgbClr val="FFFFFF"/>
+          </a:solidFill>
+          <a:ln w="12700">
+            <a:solidFill>
+              <a:srgbClr val="D9DEE8"/>
+            </a:solidFill>
+          </a:ln>
+          <a:effectLst/>
+        </p:spPr>
+        <p:style>
+          <a:lnRef idx="1">
+            <a:schemeClr val="accent1"/>
+          </a:lnRef>
+          <a:fillRef idx="3">
+            <a:schemeClr val="accent1"/>
+          </a:fillRef>
+          <a:effectRef idx="2">
+            <a:schemeClr val="accent1"/>
+          </a:effectRef>
+          <a:fontRef idx="minor">
+            <a:schemeClr val="lt1"/>
+          </a:fontRef>
+        </p:style>
+        <p:txBody>
+          <a:bodyPr rtlCol="0" anchor="ctr"/>
+          <a:lstStyle/>
+          <a:p>
+            <a:pPr algn="ctr"/>
+          </a:p>
+        </p:txBody>
+      </p:sp>
+      <p:sp>
+        <p:nvSpPr>
+          <p:cNvPr id="9" name="TextBox"/>
+          <p:cNvSpPr txBox="1"/>
+          <p:nvPr/>
+        </p:nvSpPr>
+        <p:spPr>
+          <a:xfrm>
+            <a:off x="9637776" y="2651760"/>
+            <a:ext cx="1828800" cy="2057400"/>
+          </a:xfrm>
+          <a:prstGeom prst="rect">
+            <a:avLst/>
+          </a:prstGeom>
+          <a:noFill/>
+        </p:spPr>
+        <p:txBody>
+          <a:bodyPr wrap="square" lIns="0" rIns="0" tIns="0" bIns="0" anchor="ctr">
+            <a:spAutoFit/>
+          </a:bodyPr>
+          <a:lstStyle/>
+          <a:p>
+            <a:r>
+              <a:rPr sz="1400" b="0">
+                <a:solidFill>
+                  <a:srgbClr val="585858"/>
+                </a:solidFill>
+                <a:latin typeface="Arial"/>
+              </a:rPr>
+              <a:t>Merge khi chưa bỏ P015 trùng</a:t>
+            </a:r>
+          </a:p>
+          <a:p>
+            <a:pPr>
+              <a:spcBef>
+                <a:spcPts val="200"/>
+              </a:spcBef>
+            </a:pPr>
+            <a:r>
+              <a:rPr sz="2400" b="1">
+                <a:solidFill>
+                  <a:srgbClr val="9C0006"/>
+                </a:solidFill>
+                <a:latin typeface="Arial"/>
+              </a:rPr>
+              <a:t>29.408 dòng</a:t>
+            </a:r>
+          </a:p>
+          <a:p>
+            <a:pPr>
+              <a:spcBef>
+                <a:spcPts val="200"/>
+              </a:spcBef>
+            </a:pPr>
+            <a:r>
+              <a:rPr sz="1400" b="0">
+                <a:solidFill>
+                  <a:srgbClr val="1B2230"/>
+                </a:solidFill>
+                <a:latin typeface="Arial"/>
+              </a:rPr>
+              <a:t>thay vì 28.328 — 1.080 dòng P015 bị nhân đôi</a:t>
+            </a:r>
+          </a:p>
+        </p:txBody>
+      </p:sp>
+      <p:sp>
+        <p:nvSpPr>
+          <p:cNvPr id="10" name="TIP callout"/>
+          <p:cNvSpPr/>
+          <p:nvPr/>
+        </p:nvSpPr>
+        <p:spPr>
+          <a:xfrm>
+            <a:off x="1527048" y="4937760"/>
+            <a:ext cx="10122408" cy="1188720"/>
           </a:xfrm>
           <a:prstGeom prst="roundRect">
             <a:avLst>
@@ -9162,13 +9420,13 @@
       </p:sp>
       <p:sp>
         <p:nvSpPr>
-          <p:cNvPr id="9" name="TextBox"/>
+          <p:cNvPr id="11" name="TextBox"/>
           <p:cNvSpPr txBox="1"/>
           <p:nvPr/>
         </p:nvSpPr>
         <p:spPr>
           <a:xfrm>
-            <a:off x="1636776" y="5458968"/>
+            <a:off x="1636776" y="5047488"/>
             <a:ext cx="548640" cy="320040"/>
           </a:xfrm>
           <a:prstGeom prst="rect">
@@ -9196,14 +9454,14 @@
       </p:sp>
       <p:sp>
         <p:nvSpPr>
-          <p:cNvPr id="10" name="TIP text"/>
+          <p:cNvPr id="12" name="TIP text"/>
           <p:cNvSpPr txBox="1"/>
           <p:nvPr/>
         </p:nvSpPr>
         <p:spPr>
           <a:xfrm>
-            <a:off x="2212848" y="5440679"/>
-            <a:ext cx="9326880" cy="640080"/>
+            <a:off x="2212848" y="5029200"/>
+            <a:ext cx="9326880" cy="1005840"/>
           </a:xfrm>
           <a:prstGeom prst="rect">
             <a:avLst/>
@@ -9223,14 +9481,14 @@
                 </a:solidFill>
                 <a:latin typeface="Arial"/>
               </a:rPr>
-              <a:t>Chưa bỏ P015 trùng mà Merge Sales × Product: 29.408 dòng thay vì 28.328. Đếm dòng ngay trong PQ: Transform → Count Rows, xem xong xóa bước đếm.</a:t>
-            </a:r>
-          </a:p>
-        </p:txBody>
-      </p:sp>
-      <p:sp>
-        <p:nvSpPr>
-          <p:cNvPr id="11" name="Footnote"/>
+              <a:t>Đếm dòng ngay trong Power Query: Transform → Count Rows, xem số, rồi xóa bước đó. Remove Duplicates chỉ xét các cột đang chọn: chọn cả bảng (Ctrl+A) cho bảng giao dịch, chỉ cột khóa cho bảng lookup.</a:t>
+            </a:r>
+          </a:p>
+        </p:txBody>
+      </p:sp>
+      <p:sp>
+        <p:nvSpPr>
+          <p:cNvPr id="13" name="Footnote"/>
           <p:cNvSpPr txBox="1"/>
           <p:nvPr/>
         </p:nvSpPr>
@@ -9984,8 +10242,8 @@
         </p:blipFill>
         <p:spPr>
           <a:xfrm>
-            <a:off x="1527048" y="2833107"/>
-            <a:ext cx="4114800" cy="1969026"/>
+            <a:off x="1527048" y="2684045"/>
+            <a:ext cx="4114800" cy="2267150"/>
           </a:xfrm>
           <a:prstGeom prst="rect">
             <a:avLst/>
@@ -10013,8 +10271,8 @@
         </p:blipFill>
         <p:spPr>
           <a:xfrm>
-            <a:off x="5779008" y="2833107"/>
-            <a:ext cx="4114800" cy="1969026"/>
+            <a:off x="5779008" y="2684045"/>
+            <a:ext cx="4114800" cy="2267150"/>
           </a:xfrm>
           <a:prstGeom prst="rect">
             <a:avLst/>
@@ -10587,7 +10845,7 @@
                 </a:solidFill>
                 <a:latin typeface="Arial"/>
               </a:rPr>
-              <a:t>353 tr</a:t>
+              <a:t>353.000.000</a:t>
             </a:r>
           </a:p>
           <a:p>
@@ -10603,7 +10861,7 @@
                 </a:solidFill>
                 <a:latin typeface="Arial"/>
               </a:rPr>
-              <a:t>thực tế 425,85 tr · 120,6%</a:t>
+              <a:t>thực tế 425.850.000 · 120,6%</a:t>
             </a:r>
           </a:p>
         </p:txBody>
@@ -10701,7 +10959,7 @@
                 </a:solidFill>
                 <a:latin typeface="Arial"/>
               </a:rPr>
-              <a:t>298 tr</a:t>
+              <a:t>298.000.000</a:t>
             </a:r>
           </a:p>
           <a:p>
@@ -10717,7 +10975,7 @@
                 </a:solidFill>
                 <a:latin typeface="Arial"/>
               </a:rPr>
-              <a:t>thực tế 246,0 tr · 82,5%</a:t>
+              <a:t>thực tế 245.996.000 · 82,5%</a:t>
             </a:r>
           </a:p>
         </p:txBody>
@@ -11320,7 +11578,7 @@
                           </a:solidFill>
                           <a:latin typeface="Arial"/>
                         </a:rPr>
-                        <a:t>Tên (đỏ)</a:t>
+                        <a:t>Tên</a:t>
                       </a:r>
                     </a:p>
                   </a:txBody>
@@ -15763,7 +16021,7 @@
                 </a:solidFill>
                 <a:latin typeface="Arial"/>
               </a:rPr>
-              <a:t>Ảnh: B4_&lt;HoTen&gt;.xlsx, Data → Queries &amp; Connections · Pivot PV_Refresh (Nam × Thang) phải ra 28.328 dòng, 4.139.884.500</a:t>
+              <a:t>Ảnh: B4_&lt;HoTen&gt;.xlsx, Data → Queries &amp; Connections</a:t>
             </a:r>
           </a:p>
         </p:txBody>
@@ -16188,7 +16446,7 @@
                 </a:solidFill>
                 <a:latin typeface="Arial"/>
               </a:rPr>
-              <a:t>File tháng 4: Practice/New_Month/Sales_2025-04.csv (1.920 dòng thô)</a:t>
+              <a:t>File tháng 4: Practice/New_Month/Sales_2025-04.csv</a:t>
             </a:r>
           </a:p>
         </p:txBody>
@@ -23146,7 +23404,7 @@
           <a:lstStyle/>
           <a:p>
             <a:r>
-              <a:t>Question 6: Tình huống — Refresh lỗi</a:t>
+              <a:t>Question 6: Tình huống — Lỗi ngầm</a:t>
             </a:r>
           </a:p>
         </p:txBody>
@@ -23209,13 +23467,13 @@
           <a:lstStyle/>
           <a:p>
             <a:r>
-              <a:rPr sz="2000" b="0">
+              <a:rPr sz="1800" b="0">
                 <a:solidFill>
                   <a:srgbClr val="1B2230"/>
                 </a:solidFill>
                 <a:latin typeface="Arial"/>
               </a:rPr>
-              <a:t>File CSV mới đổi tên cột Store_Code thành StoreCode. Refresh báo lỗi ở bước Trim cột Store_Code. Nguyên nhân?</a:t>
+              <a:t>File CSV tháng mới đổi tên cột Store_Code thành StoreCode. Refresh All không báo lỗi, nhưng bộ lọc Store_Code của Pivot có thêm mục (blank). Nguyên nhân?</a:t>
             </a:r>
           </a:p>
         </p:txBody>
@@ -23342,13 +23600,13 @@
           <a:lstStyle/>
           <a:p>
             <a:r>
-              <a:rPr sz="1400" b="0">
+              <a:rPr sz="1300" b="0">
                 <a:solidFill>
                   <a:srgbClr val="1B2230"/>
                 </a:solidFill>
                 <a:latin typeface="Arial"/>
               </a:rPr>
-              <a:t>File bị hỏng</a:t>
+              <a:t>File mới bị hỏng</a:t>
             </a:r>
           </a:p>
         </p:txBody>
@@ -23475,7 +23733,7 @@
           <a:lstStyle/>
           <a:p>
             <a:r>
-              <a:rPr sz="1400" b="0">
+              <a:rPr sz="1300" b="0">
                 <a:solidFill>
                   <a:srgbClr val="1B2230"/>
                 </a:solidFill>
@@ -23608,7 +23866,7 @@
           <a:lstStyle/>
           <a:p>
             <a:r>
-              <a:rPr sz="1400" b="0">
+              <a:rPr sz="1300" b="0">
                 <a:solidFill>
                   <a:srgbClr val="1B2230"/>
                 </a:solidFill>
@@ -23840,13 +24098,13 @@
           <a:lstStyle/>
           <a:p>
             <a:r>
-              <a:rPr sz="1400" b="0">
+              <a:rPr sz="1300" b="0">
                 <a:solidFill>
                   <a:srgbClr val="1B2230"/>
                 </a:solidFill>
                 <a:latin typeface="Arial"/>
               </a:rPr>
-              <a:t>Bước Trim gọi đích danh tên cột Store_Code, cột đó không còn tồn tại với tên mới</a:t>
+              <a:t>Combine lấy tên cột theo file mẫu: file mới thiếu cột Store_Code nên để trống, cột StoreCode bị bỏ</a:t>
             </a:r>
           </a:p>
         </p:txBody>
@@ -28564,7 +28822,7 @@
                           </a:solidFill>
                           <a:latin typeface="Arial"/>
                         </a:rPr>
-                        <a:t>Tên (đỏ)</a:t>
+                        <a:t>Tên</a:t>
                       </a:r>
                     </a:p>
                   </a:txBody>
